--- a/docx4j-core-tests/src/test/resources/charts/authoring/p5p-add-category-after.pptx
+++ b/docx4j-core-tests/src/test/resources/charts/authoring/p5p-add-category-after.pptx
@@ -201,7 +201,7 @@
           </c:val>
           <c:extLst>
             <c:ext xmlns:c16="http://schemas.microsoft.com/office/drawing/2014/chart" uri="{C3380CC4-5D6E-409C-BE32-E72D297353CC}">
-              <c16:uniqueId val="{00000000-F53F-4D86-828E-920234B0CD76}"/>
+              <c16:uniqueId val="{00000000-5034-4707-B5B1-CB49FEE10AC0}"/>
             </c:ext>
           </c:extLst>
         </c:ser>
@@ -278,7 +278,7 @@
           </c:val>
           <c:extLst>
             <c:ext xmlns:c16="http://schemas.microsoft.com/office/drawing/2014/chart" uri="{C3380CC4-5D6E-409C-BE32-E72D297353CC}">
-              <c16:uniqueId val="{00000001-F53F-4D86-828E-920234B0CD76}"/>
+              <c16:uniqueId val="{00000001-5034-4707-B5B1-CB49FEE10AC0}"/>
             </c:ext>
           </c:extLst>
         </c:ser>
@@ -347,12 +347,15 @@
                 <c:pt idx="3">
                   <c:v>5</c:v>
                 </c:pt>
+                <c:pt idx="4">
+                  <c:v>4</c:v>
+                </c:pt>
               </c:numCache>
             </c:numRef>
           </c:val>
           <c:extLst>
             <c:ext xmlns:c16="http://schemas.microsoft.com/office/drawing/2014/chart" uri="{C3380CC4-5D6E-409C-BE32-E72D297353CC}">
-              <c16:uniqueId val="{00000002-F53F-4D86-828E-920234B0CD76}"/>
+              <c16:uniqueId val="{00000002-5034-4707-B5B1-CB49FEE10AC0}"/>
             </c:ext>
           </c:extLst>
         </c:ser>
@@ -366,11 +369,11 @@
         </c:dLbls>
         <c:gapWidth val="219"/>
         <c:overlap val="-27"/>
-        <c:axId val="330639408"/>
-        <c:axId val="328977344"/>
+        <c:axId val="1902912944"/>
+        <c:axId val="1903194944"/>
       </c:barChart>
       <c:catAx>
-        <c:axId val="330639408"/>
+        <c:axId val="1902912944"/>
         <c:scaling>
           <c:orientation val="minMax"/>
         </c:scaling>
@@ -413,7 +416,7 @@
             <a:endParaRPr lang="en-US"/>
           </a:p>
         </c:txPr>
-        <c:crossAx val="328977344"/>
+        <c:crossAx val="1903194944"/>
         <c:crosses val="autoZero"/>
         <c:auto val="1"/>
         <c:lblAlgn val="ctr"/>
@@ -421,7 +424,7 @@
         <c:noMultiLvlLbl val="0"/>
       </c:catAx>
       <c:valAx>
-        <c:axId val="328977344"/>
+        <c:axId val="1903194944"/>
         <c:scaling>
           <c:orientation val="minMax"/>
         </c:scaling>
@@ -472,7 +475,7 @@
             <a:endParaRPr lang="en-US"/>
           </a:p>
         </c:txPr>
-        <c:crossAx val="330639408"/>
+        <c:crossAx val="1902912944"/>
         <c:crosses val="autoZero"/>
         <c:crossBetween val="between"/>
       </c:valAx>
@@ -1114,7 +1117,7 @@
           <p:cNvPr id="2" name="Title 1">
             <a:extLst>
               <a:ext uri="{FF2B5EF4-FFF2-40B4-BE49-F238E27FC236}">
-                <a16:creationId xmlns:a16="http://schemas.microsoft.com/office/drawing/2014/main" id="{30DB2777-06BE-0A26-8306-B836FFA656F6}"/>
+                <a16:creationId xmlns:a16="http://schemas.microsoft.com/office/drawing/2014/main" id="{EB931246-3F23-6B53-5DA9-84F54567E113}"/>
               </a:ext>
             </a:extLst>
           </p:cNvPr>
@@ -1152,7 +1155,7 @@
           <p:cNvPr id="3" name="Subtitle 2">
             <a:extLst>
               <a:ext uri="{FF2B5EF4-FFF2-40B4-BE49-F238E27FC236}">
-                <a16:creationId xmlns:a16="http://schemas.microsoft.com/office/drawing/2014/main" id="{49EF6672-D477-80D7-1D69-3448F3B2511A}"/>
+                <a16:creationId xmlns:a16="http://schemas.microsoft.com/office/drawing/2014/main" id="{3FE6FAC3-0333-A242-1DBA-0782C520AC20}"/>
               </a:ext>
             </a:extLst>
           </p:cNvPr>
@@ -1223,7 +1226,7 @@
           <p:cNvPr id="4" name="Date Placeholder 3">
             <a:extLst>
               <a:ext uri="{FF2B5EF4-FFF2-40B4-BE49-F238E27FC236}">
-                <a16:creationId xmlns:a16="http://schemas.microsoft.com/office/drawing/2014/main" id="{B4AEDF3F-7C79-F829-2B58-60398CD36850}"/>
+                <a16:creationId xmlns:a16="http://schemas.microsoft.com/office/drawing/2014/main" id="{9C6E0BEF-4F40-AA15-2E33-A375FAA1F7AB}"/>
               </a:ext>
             </a:extLst>
           </p:cNvPr>
@@ -1239,7 +1242,7 @@
           <a:bodyPr/>
           <a:lstStyle/>
           <a:p>
-            <a:fld id="{36CB4863-D0CF-4C1A-A897-B2DF874DF1A6}" type="datetimeFigureOut">
+            <a:fld id="{9BCF9E6B-1C29-4342-BE51-1B794D97C70F}" type="datetimeFigureOut">
               <a:rPr lang="en-AU" smtClean="0"/>
               <a:t>12/10/2026</a:t>
             </a:fld>
@@ -1252,7 +1255,7 @@
           <p:cNvPr id="5" name="Footer Placeholder 4">
             <a:extLst>
               <a:ext uri="{FF2B5EF4-FFF2-40B4-BE49-F238E27FC236}">
-                <a16:creationId xmlns:a16="http://schemas.microsoft.com/office/drawing/2014/main" id="{BE218559-09A4-2A1C-46B3-42F29C19B9C0}"/>
+                <a16:creationId xmlns:a16="http://schemas.microsoft.com/office/drawing/2014/main" id="{F19D3B2D-07FB-E64A-7E9E-BAAD2C31AD5C}"/>
               </a:ext>
             </a:extLst>
           </p:cNvPr>
@@ -1277,7 +1280,7 @@
           <p:cNvPr id="6" name="Slide Number Placeholder 5">
             <a:extLst>
               <a:ext uri="{FF2B5EF4-FFF2-40B4-BE49-F238E27FC236}">
-                <a16:creationId xmlns:a16="http://schemas.microsoft.com/office/drawing/2014/main" id="{01926B53-6E0E-781B-7847-1D5073E998EC}"/>
+                <a16:creationId xmlns:a16="http://schemas.microsoft.com/office/drawing/2014/main" id="{8EBDF097-B437-182A-516C-3576E15E3434}"/>
               </a:ext>
             </a:extLst>
           </p:cNvPr>
@@ -1293,7 +1296,7 @@
           <a:bodyPr/>
           <a:lstStyle/>
           <a:p>
-            <a:fld id="{2C4A8359-268D-4158-99FA-D0799F550B99}" type="slidenum">
+            <a:fld id="{1F8382C8-8D4E-4911-9A2B-0027B4E5022E}" type="slidenum">
               <a:rPr lang="en-AU" smtClean="0"/>
               <a:t>‹#›</a:t>
             </a:fld>
@@ -1304,7 +1307,7 @@
     </p:spTree>
     <p:extLst>
       <p:ext uri="{BB962C8B-B14F-4D97-AF65-F5344CB8AC3E}">
-        <p14:creationId xmlns:p14="http://schemas.microsoft.com/office/powerpoint/2010/main" val="842594514"/>
+        <p14:creationId xmlns:p14="http://schemas.microsoft.com/office/powerpoint/2010/main" val="176261152"/>
       </p:ext>
     </p:extLst>
   </p:cSld>
@@ -1336,7 +1339,7 @@
           <p:cNvPr id="2" name="Title 1">
             <a:extLst>
               <a:ext uri="{FF2B5EF4-FFF2-40B4-BE49-F238E27FC236}">
-                <a16:creationId xmlns:a16="http://schemas.microsoft.com/office/drawing/2014/main" id="{3F01E4D2-C11F-8872-922E-1B1115659428}"/>
+                <a16:creationId xmlns:a16="http://schemas.microsoft.com/office/drawing/2014/main" id="{D6F06A1D-133A-1257-5D24-DD9181627B8B}"/>
               </a:ext>
             </a:extLst>
           </p:cNvPr>
@@ -1365,7 +1368,7 @@
           <p:cNvPr id="3" name="Vertical Text Placeholder 2">
             <a:extLst>
               <a:ext uri="{FF2B5EF4-FFF2-40B4-BE49-F238E27FC236}">
-                <a16:creationId xmlns:a16="http://schemas.microsoft.com/office/drawing/2014/main" id="{E89CDA7C-0854-47C9-A3C9-2B1C2FC3032E}"/>
+                <a16:creationId xmlns:a16="http://schemas.microsoft.com/office/drawing/2014/main" id="{3B780132-65BE-AF05-11FF-CBF09E8051AF}"/>
               </a:ext>
             </a:extLst>
           </p:cNvPr>
@@ -1423,7 +1426,7 @@
           <p:cNvPr id="4" name="Date Placeholder 3">
             <a:extLst>
               <a:ext uri="{FF2B5EF4-FFF2-40B4-BE49-F238E27FC236}">
-                <a16:creationId xmlns:a16="http://schemas.microsoft.com/office/drawing/2014/main" id="{26F43EA9-8C19-F3EA-EEFD-0593781FC708}"/>
+                <a16:creationId xmlns:a16="http://schemas.microsoft.com/office/drawing/2014/main" id="{AB479A3B-42DC-4B32-3BFF-672D82062CA4}"/>
               </a:ext>
             </a:extLst>
           </p:cNvPr>
@@ -1439,7 +1442,7 @@
           <a:bodyPr/>
           <a:lstStyle/>
           <a:p>
-            <a:fld id="{36CB4863-D0CF-4C1A-A897-B2DF874DF1A6}" type="datetimeFigureOut">
+            <a:fld id="{9BCF9E6B-1C29-4342-BE51-1B794D97C70F}" type="datetimeFigureOut">
               <a:rPr lang="en-AU" smtClean="0"/>
               <a:t>12/10/2026</a:t>
             </a:fld>
@@ -1452,7 +1455,7 @@
           <p:cNvPr id="5" name="Footer Placeholder 4">
             <a:extLst>
               <a:ext uri="{FF2B5EF4-FFF2-40B4-BE49-F238E27FC236}">
-                <a16:creationId xmlns:a16="http://schemas.microsoft.com/office/drawing/2014/main" id="{26A5F43D-7071-B585-7ABA-EBE02154833A}"/>
+                <a16:creationId xmlns:a16="http://schemas.microsoft.com/office/drawing/2014/main" id="{0C175B3F-C7AF-B3F2-2F3D-BADE665B6E56}"/>
               </a:ext>
             </a:extLst>
           </p:cNvPr>
@@ -1477,7 +1480,7 @@
           <p:cNvPr id="6" name="Slide Number Placeholder 5">
             <a:extLst>
               <a:ext uri="{FF2B5EF4-FFF2-40B4-BE49-F238E27FC236}">
-                <a16:creationId xmlns:a16="http://schemas.microsoft.com/office/drawing/2014/main" id="{0C9E79A9-33B7-2CDD-C9FE-00084ACA9C3D}"/>
+                <a16:creationId xmlns:a16="http://schemas.microsoft.com/office/drawing/2014/main" id="{2D768F6F-C3CB-72D6-039D-6FC68526994F}"/>
               </a:ext>
             </a:extLst>
           </p:cNvPr>
@@ -1493,7 +1496,7 @@
           <a:bodyPr/>
           <a:lstStyle/>
           <a:p>
-            <a:fld id="{2C4A8359-268D-4158-99FA-D0799F550B99}" type="slidenum">
+            <a:fld id="{1F8382C8-8D4E-4911-9A2B-0027B4E5022E}" type="slidenum">
               <a:rPr lang="en-AU" smtClean="0"/>
               <a:t>‹#›</a:t>
             </a:fld>
@@ -1504,7 +1507,7 @@
     </p:spTree>
     <p:extLst>
       <p:ext uri="{BB962C8B-B14F-4D97-AF65-F5344CB8AC3E}">
-        <p14:creationId xmlns:p14="http://schemas.microsoft.com/office/powerpoint/2010/main" val="2669826506"/>
+        <p14:creationId xmlns:p14="http://schemas.microsoft.com/office/powerpoint/2010/main" val="3628666796"/>
       </p:ext>
     </p:extLst>
   </p:cSld>
@@ -1536,7 +1539,7 @@
           <p:cNvPr id="2" name="Vertical Title 1">
             <a:extLst>
               <a:ext uri="{FF2B5EF4-FFF2-40B4-BE49-F238E27FC236}">
-                <a16:creationId xmlns:a16="http://schemas.microsoft.com/office/drawing/2014/main" id="{25D15930-D659-FF70-F089-7A812578C965}"/>
+                <a16:creationId xmlns:a16="http://schemas.microsoft.com/office/drawing/2014/main" id="{304B44E1-ECA4-C7ED-E8E4-F5F052AB40F7}"/>
               </a:ext>
             </a:extLst>
           </p:cNvPr>
@@ -1570,7 +1573,7 @@
           <p:cNvPr id="3" name="Vertical Text Placeholder 2">
             <a:extLst>
               <a:ext uri="{FF2B5EF4-FFF2-40B4-BE49-F238E27FC236}">
-                <a16:creationId xmlns:a16="http://schemas.microsoft.com/office/drawing/2014/main" id="{0F9B8B8D-851C-3FB4-7E73-4E951AF2B904}"/>
+                <a16:creationId xmlns:a16="http://schemas.microsoft.com/office/drawing/2014/main" id="{D1AF27D4-999A-1D29-EBCB-E5B017EC408A}"/>
               </a:ext>
             </a:extLst>
           </p:cNvPr>
@@ -1633,7 +1636,7 @@
           <p:cNvPr id="4" name="Date Placeholder 3">
             <a:extLst>
               <a:ext uri="{FF2B5EF4-FFF2-40B4-BE49-F238E27FC236}">
-                <a16:creationId xmlns:a16="http://schemas.microsoft.com/office/drawing/2014/main" id="{8EDB766B-E97F-C144-808B-795DC1CA264E}"/>
+                <a16:creationId xmlns:a16="http://schemas.microsoft.com/office/drawing/2014/main" id="{9DCCA761-964D-023C-A7BE-22FE5F27E831}"/>
               </a:ext>
             </a:extLst>
           </p:cNvPr>
@@ -1649,7 +1652,7 @@
           <a:bodyPr/>
           <a:lstStyle/>
           <a:p>
-            <a:fld id="{36CB4863-D0CF-4C1A-A897-B2DF874DF1A6}" type="datetimeFigureOut">
+            <a:fld id="{9BCF9E6B-1C29-4342-BE51-1B794D97C70F}" type="datetimeFigureOut">
               <a:rPr lang="en-AU" smtClean="0"/>
               <a:t>12/10/2026</a:t>
             </a:fld>
@@ -1662,7 +1665,7 @@
           <p:cNvPr id="5" name="Footer Placeholder 4">
             <a:extLst>
               <a:ext uri="{FF2B5EF4-FFF2-40B4-BE49-F238E27FC236}">
-                <a16:creationId xmlns:a16="http://schemas.microsoft.com/office/drawing/2014/main" id="{8C98CEFF-8827-1C26-554A-940966A44524}"/>
+                <a16:creationId xmlns:a16="http://schemas.microsoft.com/office/drawing/2014/main" id="{7E4816AB-8C73-190B-8C07-BE3405D6AE62}"/>
               </a:ext>
             </a:extLst>
           </p:cNvPr>
@@ -1687,7 +1690,7 @@
           <p:cNvPr id="6" name="Slide Number Placeholder 5">
             <a:extLst>
               <a:ext uri="{FF2B5EF4-FFF2-40B4-BE49-F238E27FC236}">
-                <a16:creationId xmlns:a16="http://schemas.microsoft.com/office/drawing/2014/main" id="{6EAA68F9-5197-8A0B-18A2-0597FB3D9007}"/>
+                <a16:creationId xmlns:a16="http://schemas.microsoft.com/office/drawing/2014/main" id="{1BEFB4AF-3E6E-5CC3-DD26-EC8FABA96C5F}"/>
               </a:ext>
             </a:extLst>
           </p:cNvPr>
@@ -1703,7 +1706,7 @@
           <a:bodyPr/>
           <a:lstStyle/>
           <a:p>
-            <a:fld id="{2C4A8359-268D-4158-99FA-D0799F550B99}" type="slidenum">
+            <a:fld id="{1F8382C8-8D4E-4911-9A2B-0027B4E5022E}" type="slidenum">
               <a:rPr lang="en-AU" smtClean="0"/>
               <a:t>‹#›</a:t>
             </a:fld>
@@ -1714,7 +1717,7 @@
     </p:spTree>
     <p:extLst>
       <p:ext uri="{BB962C8B-B14F-4D97-AF65-F5344CB8AC3E}">
-        <p14:creationId xmlns:p14="http://schemas.microsoft.com/office/powerpoint/2010/main" val="711998038"/>
+        <p14:creationId xmlns:p14="http://schemas.microsoft.com/office/powerpoint/2010/main" val="1099971653"/>
       </p:ext>
     </p:extLst>
   </p:cSld>
@@ -1746,7 +1749,7 @@
           <p:cNvPr id="2" name="Title 1">
             <a:extLst>
               <a:ext uri="{FF2B5EF4-FFF2-40B4-BE49-F238E27FC236}">
-                <a16:creationId xmlns:a16="http://schemas.microsoft.com/office/drawing/2014/main" id="{B9775519-20E9-7D13-D6F4-B081AB71F18F}"/>
+                <a16:creationId xmlns:a16="http://schemas.microsoft.com/office/drawing/2014/main" id="{16C13943-4608-C447-3C47-93EB5374B6E3}"/>
               </a:ext>
             </a:extLst>
           </p:cNvPr>
@@ -1775,7 +1778,7 @@
           <p:cNvPr id="3" name="Content Placeholder 2">
             <a:extLst>
               <a:ext uri="{FF2B5EF4-FFF2-40B4-BE49-F238E27FC236}">
-                <a16:creationId xmlns:a16="http://schemas.microsoft.com/office/drawing/2014/main" id="{7FF3EF26-F554-05D6-D75C-052027F996F3}"/>
+                <a16:creationId xmlns:a16="http://schemas.microsoft.com/office/drawing/2014/main" id="{F98D8DDA-38C5-473B-BB52-846F41965B05}"/>
               </a:ext>
             </a:extLst>
           </p:cNvPr>
@@ -1833,7 +1836,7 @@
           <p:cNvPr id="4" name="Date Placeholder 3">
             <a:extLst>
               <a:ext uri="{FF2B5EF4-FFF2-40B4-BE49-F238E27FC236}">
-                <a16:creationId xmlns:a16="http://schemas.microsoft.com/office/drawing/2014/main" id="{2078855C-F2F3-5578-FB23-68A56FCDB1F3}"/>
+                <a16:creationId xmlns:a16="http://schemas.microsoft.com/office/drawing/2014/main" id="{DAA5CA6E-1068-A5A6-DAA3-22053AAC6B9B}"/>
               </a:ext>
             </a:extLst>
           </p:cNvPr>
@@ -1849,7 +1852,7 @@
           <a:bodyPr/>
           <a:lstStyle/>
           <a:p>
-            <a:fld id="{36CB4863-D0CF-4C1A-A897-B2DF874DF1A6}" type="datetimeFigureOut">
+            <a:fld id="{9BCF9E6B-1C29-4342-BE51-1B794D97C70F}" type="datetimeFigureOut">
               <a:rPr lang="en-AU" smtClean="0"/>
               <a:t>12/10/2026</a:t>
             </a:fld>
@@ -1862,7 +1865,7 @@
           <p:cNvPr id="5" name="Footer Placeholder 4">
             <a:extLst>
               <a:ext uri="{FF2B5EF4-FFF2-40B4-BE49-F238E27FC236}">
-                <a16:creationId xmlns:a16="http://schemas.microsoft.com/office/drawing/2014/main" id="{4514B19B-F11B-AB9F-33F0-AFA63D7E2A0F}"/>
+                <a16:creationId xmlns:a16="http://schemas.microsoft.com/office/drawing/2014/main" id="{DBA042B0-E208-F6CA-F1F7-2BBC827F2EC8}"/>
               </a:ext>
             </a:extLst>
           </p:cNvPr>
@@ -1887,7 +1890,7 @@
           <p:cNvPr id="6" name="Slide Number Placeholder 5">
             <a:extLst>
               <a:ext uri="{FF2B5EF4-FFF2-40B4-BE49-F238E27FC236}">
-                <a16:creationId xmlns:a16="http://schemas.microsoft.com/office/drawing/2014/main" id="{BD052C27-2B2C-3C8A-ED12-9A1AB486561E}"/>
+                <a16:creationId xmlns:a16="http://schemas.microsoft.com/office/drawing/2014/main" id="{26178DB5-4551-259B-F4AE-041387B8C900}"/>
               </a:ext>
             </a:extLst>
           </p:cNvPr>
@@ -1903,7 +1906,7 @@
           <a:bodyPr/>
           <a:lstStyle/>
           <a:p>
-            <a:fld id="{2C4A8359-268D-4158-99FA-D0799F550B99}" type="slidenum">
+            <a:fld id="{1F8382C8-8D4E-4911-9A2B-0027B4E5022E}" type="slidenum">
               <a:rPr lang="en-AU" smtClean="0"/>
               <a:t>‹#›</a:t>
             </a:fld>
@@ -1914,7 +1917,7 @@
     </p:spTree>
     <p:extLst>
       <p:ext uri="{BB962C8B-B14F-4D97-AF65-F5344CB8AC3E}">
-        <p14:creationId xmlns:p14="http://schemas.microsoft.com/office/powerpoint/2010/main" val="1162799704"/>
+        <p14:creationId xmlns:p14="http://schemas.microsoft.com/office/powerpoint/2010/main" val="3102005971"/>
       </p:ext>
     </p:extLst>
   </p:cSld>
@@ -1946,7 +1949,7 @@
           <p:cNvPr id="2" name="Title 1">
             <a:extLst>
               <a:ext uri="{FF2B5EF4-FFF2-40B4-BE49-F238E27FC236}">
-                <a16:creationId xmlns:a16="http://schemas.microsoft.com/office/drawing/2014/main" id="{8CEB03F5-D8EC-6D58-F072-FF641B74AB1B}"/>
+                <a16:creationId xmlns:a16="http://schemas.microsoft.com/office/drawing/2014/main" id="{886F64CC-54F3-A603-C021-22840F9C81C5}"/>
               </a:ext>
             </a:extLst>
           </p:cNvPr>
@@ -1984,7 +1987,7 @@
           <p:cNvPr id="3" name="Text Placeholder 2">
             <a:extLst>
               <a:ext uri="{FF2B5EF4-FFF2-40B4-BE49-F238E27FC236}">
-                <a16:creationId xmlns:a16="http://schemas.microsoft.com/office/drawing/2014/main" id="{D9E44944-140A-6CA5-3F88-02B04299A162}"/>
+                <a16:creationId xmlns:a16="http://schemas.microsoft.com/office/drawing/2014/main" id="{F435AB46-406E-E876-A782-12595D5A8C39}"/>
               </a:ext>
             </a:extLst>
           </p:cNvPr>
@@ -2109,7 +2112,7 @@
           <p:cNvPr id="4" name="Date Placeholder 3">
             <a:extLst>
               <a:ext uri="{FF2B5EF4-FFF2-40B4-BE49-F238E27FC236}">
-                <a16:creationId xmlns:a16="http://schemas.microsoft.com/office/drawing/2014/main" id="{7D5474AD-E3FF-17D8-B58B-551360CC65C4}"/>
+                <a16:creationId xmlns:a16="http://schemas.microsoft.com/office/drawing/2014/main" id="{FAF2AD8B-D3E3-E198-843E-BB7EC168954E}"/>
               </a:ext>
             </a:extLst>
           </p:cNvPr>
@@ -2125,7 +2128,7 @@
           <a:bodyPr/>
           <a:lstStyle/>
           <a:p>
-            <a:fld id="{36CB4863-D0CF-4C1A-A897-B2DF874DF1A6}" type="datetimeFigureOut">
+            <a:fld id="{9BCF9E6B-1C29-4342-BE51-1B794D97C70F}" type="datetimeFigureOut">
               <a:rPr lang="en-AU" smtClean="0"/>
               <a:t>12/10/2026</a:t>
             </a:fld>
@@ -2138,7 +2141,7 @@
           <p:cNvPr id="5" name="Footer Placeholder 4">
             <a:extLst>
               <a:ext uri="{FF2B5EF4-FFF2-40B4-BE49-F238E27FC236}">
-                <a16:creationId xmlns:a16="http://schemas.microsoft.com/office/drawing/2014/main" id="{8B595FB5-A3AC-3922-B6C0-273FA900A70B}"/>
+                <a16:creationId xmlns:a16="http://schemas.microsoft.com/office/drawing/2014/main" id="{DED511CE-47FC-41C3-318E-A648E0AE7811}"/>
               </a:ext>
             </a:extLst>
           </p:cNvPr>
@@ -2163,7 +2166,7 @@
           <p:cNvPr id="6" name="Slide Number Placeholder 5">
             <a:extLst>
               <a:ext uri="{FF2B5EF4-FFF2-40B4-BE49-F238E27FC236}">
-                <a16:creationId xmlns:a16="http://schemas.microsoft.com/office/drawing/2014/main" id="{32AF571A-32F0-E6EF-C683-C8242D0C5ECB}"/>
+                <a16:creationId xmlns:a16="http://schemas.microsoft.com/office/drawing/2014/main" id="{BA9B66E5-DF2C-ECD5-AB32-5EF6608476BF}"/>
               </a:ext>
             </a:extLst>
           </p:cNvPr>
@@ -2179,7 +2182,7 @@
           <a:bodyPr/>
           <a:lstStyle/>
           <a:p>
-            <a:fld id="{2C4A8359-268D-4158-99FA-D0799F550B99}" type="slidenum">
+            <a:fld id="{1F8382C8-8D4E-4911-9A2B-0027B4E5022E}" type="slidenum">
               <a:rPr lang="en-AU" smtClean="0"/>
               <a:t>‹#›</a:t>
             </a:fld>
@@ -2190,7 +2193,7 @@
     </p:spTree>
     <p:extLst>
       <p:ext uri="{BB962C8B-B14F-4D97-AF65-F5344CB8AC3E}">
-        <p14:creationId xmlns:p14="http://schemas.microsoft.com/office/powerpoint/2010/main" val="711032838"/>
+        <p14:creationId xmlns:p14="http://schemas.microsoft.com/office/powerpoint/2010/main" val="1859185260"/>
       </p:ext>
     </p:extLst>
   </p:cSld>
@@ -2222,7 +2225,7 @@
           <p:cNvPr id="2" name="Title 1">
             <a:extLst>
               <a:ext uri="{FF2B5EF4-FFF2-40B4-BE49-F238E27FC236}">
-                <a16:creationId xmlns:a16="http://schemas.microsoft.com/office/drawing/2014/main" id="{C9D541A9-36BB-8CC5-8FAF-45CED263D78D}"/>
+                <a16:creationId xmlns:a16="http://schemas.microsoft.com/office/drawing/2014/main" id="{E4756708-4CA0-DF69-2217-577E160D2DF1}"/>
               </a:ext>
             </a:extLst>
           </p:cNvPr>
@@ -2251,7 +2254,7 @@
           <p:cNvPr id="3" name="Content Placeholder 2">
             <a:extLst>
               <a:ext uri="{FF2B5EF4-FFF2-40B4-BE49-F238E27FC236}">
-                <a16:creationId xmlns:a16="http://schemas.microsoft.com/office/drawing/2014/main" id="{E7BF9A42-4AED-8914-AA72-A80CED82C06F}"/>
+                <a16:creationId xmlns:a16="http://schemas.microsoft.com/office/drawing/2014/main" id="{0694E3A2-C22A-5C09-3585-7D4DB7F5A7E3}"/>
               </a:ext>
             </a:extLst>
           </p:cNvPr>
@@ -2314,7 +2317,7 @@
           <p:cNvPr id="4" name="Content Placeholder 3">
             <a:extLst>
               <a:ext uri="{FF2B5EF4-FFF2-40B4-BE49-F238E27FC236}">
-                <a16:creationId xmlns:a16="http://schemas.microsoft.com/office/drawing/2014/main" id="{F9EC13F4-3C57-E102-6D1D-A98964F0D614}"/>
+                <a16:creationId xmlns:a16="http://schemas.microsoft.com/office/drawing/2014/main" id="{0E2A05D3-E979-18B0-B057-94525B31E55F}"/>
               </a:ext>
             </a:extLst>
           </p:cNvPr>
@@ -2377,7 +2380,7 @@
           <p:cNvPr id="5" name="Date Placeholder 4">
             <a:extLst>
               <a:ext uri="{FF2B5EF4-FFF2-40B4-BE49-F238E27FC236}">
-                <a16:creationId xmlns:a16="http://schemas.microsoft.com/office/drawing/2014/main" id="{894E6EFA-0BEB-C111-3187-788DFFF255A5}"/>
+                <a16:creationId xmlns:a16="http://schemas.microsoft.com/office/drawing/2014/main" id="{7F00EC4F-25CB-7884-587C-FF9278ACEE72}"/>
               </a:ext>
             </a:extLst>
           </p:cNvPr>
@@ -2393,7 +2396,7 @@
           <a:bodyPr/>
           <a:lstStyle/>
           <a:p>
-            <a:fld id="{36CB4863-D0CF-4C1A-A897-B2DF874DF1A6}" type="datetimeFigureOut">
+            <a:fld id="{9BCF9E6B-1C29-4342-BE51-1B794D97C70F}" type="datetimeFigureOut">
               <a:rPr lang="en-AU" smtClean="0"/>
               <a:t>12/10/2026</a:t>
             </a:fld>
@@ -2406,7 +2409,7 @@
           <p:cNvPr id="6" name="Footer Placeholder 5">
             <a:extLst>
               <a:ext uri="{FF2B5EF4-FFF2-40B4-BE49-F238E27FC236}">
-                <a16:creationId xmlns:a16="http://schemas.microsoft.com/office/drawing/2014/main" id="{D47DDD0B-B0E7-3CBA-196A-879E5A7D438D}"/>
+                <a16:creationId xmlns:a16="http://schemas.microsoft.com/office/drawing/2014/main" id="{FC6D5C53-DE28-D41F-14B0-B0410ED1E2F5}"/>
               </a:ext>
             </a:extLst>
           </p:cNvPr>
@@ -2431,7 +2434,7 @@
           <p:cNvPr id="7" name="Slide Number Placeholder 6">
             <a:extLst>
               <a:ext uri="{FF2B5EF4-FFF2-40B4-BE49-F238E27FC236}">
-                <a16:creationId xmlns:a16="http://schemas.microsoft.com/office/drawing/2014/main" id="{70B20BBD-8877-0299-A865-981371A0A212}"/>
+                <a16:creationId xmlns:a16="http://schemas.microsoft.com/office/drawing/2014/main" id="{1D58BF45-73E0-85A4-0446-E9EF951632B0}"/>
               </a:ext>
             </a:extLst>
           </p:cNvPr>
@@ -2447,7 +2450,7 @@
           <a:bodyPr/>
           <a:lstStyle/>
           <a:p>
-            <a:fld id="{2C4A8359-268D-4158-99FA-D0799F550B99}" type="slidenum">
+            <a:fld id="{1F8382C8-8D4E-4911-9A2B-0027B4E5022E}" type="slidenum">
               <a:rPr lang="en-AU" smtClean="0"/>
               <a:t>‹#›</a:t>
             </a:fld>
@@ -2458,7 +2461,7 @@
     </p:spTree>
     <p:extLst>
       <p:ext uri="{BB962C8B-B14F-4D97-AF65-F5344CB8AC3E}">
-        <p14:creationId xmlns:p14="http://schemas.microsoft.com/office/powerpoint/2010/main" val="4061411894"/>
+        <p14:creationId xmlns:p14="http://schemas.microsoft.com/office/powerpoint/2010/main" val="1605230646"/>
       </p:ext>
     </p:extLst>
   </p:cSld>
@@ -2490,7 +2493,7 @@
           <p:cNvPr id="2" name="Title 1">
             <a:extLst>
               <a:ext uri="{FF2B5EF4-FFF2-40B4-BE49-F238E27FC236}">
-                <a16:creationId xmlns:a16="http://schemas.microsoft.com/office/drawing/2014/main" id="{D5ADDB54-8174-2779-A5AD-1E3D940BE8D7}"/>
+                <a16:creationId xmlns:a16="http://schemas.microsoft.com/office/drawing/2014/main" id="{8DF0A76A-9F12-07E7-0A51-6AFEF0915B74}"/>
               </a:ext>
             </a:extLst>
           </p:cNvPr>
@@ -2524,7 +2527,7 @@
           <p:cNvPr id="3" name="Text Placeholder 2">
             <a:extLst>
               <a:ext uri="{FF2B5EF4-FFF2-40B4-BE49-F238E27FC236}">
-                <a16:creationId xmlns:a16="http://schemas.microsoft.com/office/drawing/2014/main" id="{8EE8DED0-2D6E-68A6-0B7A-5AE882D0C381}"/>
+                <a16:creationId xmlns:a16="http://schemas.microsoft.com/office/drawing/2014/main" id="{274CD1F5-30AD-05DB-727E-2B0EDB424FE4}"/>
               </a:ext>
             </a:extLst>
           </p:cNvPr>
@@ -2595,7 +2598,7 @@
           <p:cNvPr id="4" name="Content Placeholder 3">
             <a:extLst>
               <a:ext uri="{FF2B5EF4-FFF2-40B4-BE49-F238E27FC236}">
-                <a16:creationId xmlns:a16="http://schemas.microsoft.com/office/drawing/2014/main" id="{50206EC0-BF01-6691-A77C-0990D12DCE01}"/>
+                <a16:creationId xmlns:a16="http://schemas.microsoft.com/office/drawing/2014/main" id="{F48B838F-31FA-8D58-8E28-87718ABFD246}"/>
               </a:ext>
             </a:extLst>
           </p:cNvPr>
@@ -2658,7 +2661,7 @@
           <p:cNvPr id="5" name="Text Placeholder 4">
             <a:extLst>
               <a:ext uri="{FF2B5EF4-FFF2-40B4-BE49-F238E27FC236}">
-                <a16:creationId xmlns:a16="http://schemas.microsoft.com/office/drawing/2014/main" id="{8BA2E758-D16B-E2BE-5181-85035568F84A}"/>
+                <a16:creationId xmlns:a16="http://schemas.microsoft.com/office/drawing/2014/main" id="{7E17D4E9-08E7-0847-9ADE-09FCE575DE8F}"/>
               </a:ext>
             </a:extLst>
           </p:cNvPr>
@@ -2729,7 +2732,7 @@
           <p:cNvPr id="6" name="Content Placeholder 5">
             <a:extLst>
               <a:ext uri="{FF2B5EF4-FFF2-40B4-BE49-F238E27FC236}">
-                <a16:creationId xmlns:a16="http://schemas.microsoft.com/office/drawing/2014/main" id="{7A747741-BD75-C583-53E4-5D83166E7A5B}"/>
+                <a16:creationId xmlns:a16="http://schemas.microsoft.com/office/drawing/2014/main" id="{76B3875C-FD0B-190F-F0B7-DE5260C1B161}"/>
               </a:ext>
             </a:extLst>
           </p:cNvPr>
@@ -2792,7 +2795,7 @@
           <p:cNvPr id="7" name="Date Placeholder 6">
             <a:extLst>
               <a:ext uri="{FF2B5EF4-FFF2-40B4-BE49-F238E27FC236}">
-                <a16:creationId xmlns:a16="http://schemas.microsoft.com/office/drawing/2014/main" id="{7C28C8A5-623D-D699-40BB-DA35FC368DFE}"/>
+                <a16:creationId xmlns:a16="http://schemas.microsoft.com/office/drawing/2014/main" id="{4AD1B091-26F9-3505-3066-255F1ACE6E5A}"/>
               </a:ext>
             </a:extLst>
           </p:cNvPr>
@@ -2808,7 +2811,7 @@
           <a:bodyPr/>
           <a:lstStyle/>
           <a:p>
-            <a:fld id="{36CB4863-D0CF-4C1A-A897-B2DF874DF1A6}" type="datetimeFigureOut">
+            <a:fld id="{9BCF9E6B-1C29-4342-BE51-1B794D97C70F}" type="datetimeFigureOut">
               <a:rPr lang="en-AU" smtClean="0"/>
               <a:t>12/10/2026</a:t>
             </a:fld>
@@ -2821,7 +2824,7 @@
           <p:cNvPr id="8" name="Footer Placeholder 7">
             <a:extLst>
               <a:ext uri="{FF2B5EF4-FFF2-40B4-BE49-F238E27FC236}">
-                <a16:creationId xmlns:a16="http://schemas.microsoft.com/office/drawing/2014/main" id="{0F7F7C88-0B41-EEEC-A7DF-2261F38B5E20}"/>
+                <a16:creationId xmlns:a16="http://schemas.microsoft.com/office/drawing/2014/main" id="{D7250CA6-AA60-BF0B-2331-71F0DC0D993C}"/>
               </a:ext>
             </a:extLst>
           </p:cNvPr>
@@ -2846,7 +2849,7 @@
           <p:cNvPr id="9" name="Slide Number Placeholder 8">
             <a:extLst>
               <a:ext uri="{FF2B5EF4-FFF2-40B4-BE49-F238E27FC236}">
-                <a16:creationId xmlns:a16="http://schemas.microsoft.com/office/drawing/2014/main" id="{F2588A64-047A-B6FB-9F3D-898F73668FA0}"/>
+                <a16:creationId xmlns:a16="http://schemas.microsoft.com/office/drawing/2014/main" id="{7B39DCC4-F2DF-920C-048D-85F2CDB43618}"/>
               </a:ext>
             </a:extLst>
           </p:cNvPr>
@@ -2862,7 +2865,7 @@
           <a:bodyPr/>
           <a:lstStyle/>
           <a:p>
-            <a:fld id="{2C4A8359-268D-4158-99FA-D0799F550B99}" type="slidenum">
+            <a:fld id="{1F8382C8-8D4E-4911-9A2B-0027B4E5022E}" type="slidenum">
               <a:rPr lang="en-AU" smtClean="0"/>
               <a:t>‹#›</a:t>
             </a:fld>
@@ -2873,7 +2876,7 @@
     </p:spTree>
     <p:extLst>
       <p:ext uri="{BB962C8B-B14F-4D97-AF65-F5344CB8AC3E}">
-        <p14:creationId xmlns:p14="http://schemas.microsoft.com/office/powerpoint/2010/main" val="3195738393"/>
+        <p14:creationId xmlns:p14="http://schemas.microsoft.com/office/powerpoint/2010/main" val="4185172253"/>
       </p:ext>
     </p:extLst>
   </p:cSld>
@@ -2905,7 +2908,7 @@
           <p:cNvPr id="2" name="Title 1">
             <a:extLst>
               <a:ext uri="{FF2B5EF4-FFF2-40B4-BE49-F238E27FC236}">
-                <a16:creationId xmlns:a16="http://schemas.microsoft.com/office/drawing/2014/main" id="{E6F74A24-1105-EFBA-619C-2AAB5061AFFB}"/>
+                <a16:creationId xmlns:a16="http://schemas.microsoft.com/office/drawing/2014/main" id="{B241A1D1-FFCC-8CE2-5700-4342003BE769}"/>
               </a:ext>
             </a:extLst>
           </p:cNvPr>
@@ -2934,7 +2937,7 @@
           <p:cNvPr id="3" name="Date Placeholder 2">
             <a:extLst>
               <a:ext uri="{FF2B5EF4-FFF2-40B4-BE49-F238E27FC236}">
-                <a16:creationId xmlns:a16="http://schemas.microsoft.com/office/drawing/2014/main" id="{5E30DB2D-0C36-CFF5-410E-EA18EDFFFC8E}"/>
+                <a16:creationId xmlns:a16="http://schemas.microsoft.com/office/drawing/2014/main" id="{72105FF6-2CF3-82D6-AB9B-92BB551943F8}"/>
               </a:ext>
             </a:extLst>
           </p:cNvPr>
@@ -2950,7 +2953,7 @@
           <a:bodyPr/>
           <a:lstStyle/>
           <a:p>
-            <a:fld id="{36CB4863-D0CF-4C1A-A897-B2DF874DF1A6}" type="datetimeFigureOut">
+            <a:fld id="{9BCF9E6B-1C29-4342-BE51-1B794D97C70F}" type="datetimeFigureOut">
               <a:rPr lang="en-AU" smtClean="0"/>
               <a:t>12/10/2026</a:t>
             </a:fld>
@@ -2963,7 +2966,7 @@
           <p:cNvPr id="4" name="Footer Placeholder 3">
             <a:extLst>
               <a:ext uri="{FF2B5EF4-FFF2-40B4-BE49-F238E27FC236}">
-                <a16:creationId xmlns:a16="http://schemas.microsoft.com/office/drawing/2014/main" id="{496910A9-48FD-E725-1078-B5BD40C84CAC}"/>
+                <a16:creationId xmlns:a16="http://schemas.microsoft.com/office/drawing/2014/main" id="{2B3AA010-C14F-E91A-D049-1FFD66C724BC}"/>
               </a:ext>
             </a:extLst>
           </p:cNvPr>
@@ -2988,7 +2991,7 @@
           <p:cNvPr id="5" name="Slide Number Placeholder 4">
             <a:extLst>
               <a:ext uri="{FF2B5EF4-FFF2-40B4-BE49-F238E27FC236}">
-                <a16:creationId xmlns:a16="http://schemas.microsoft.com/office/drawing/2014/main" id="{EFA6770F-11F0-7A24-DCBA-C597A9570426}"/>
+                <a16:creationId xmlns:a16="http://schemas.microsoft.com/office/drawing/2014/main" id="{05FD236B-D766-C113-C090-71622FD275B7}"/>
               </a:ext>
             </a:extLst>
           </p:cNvPr>
@@ -3004,7 +3007,7 @@
           <a:bodyPr/>
           <a:lstStyle/>
           <a:p>
-            <a:fld id="{2C4A8359-268D-4158-99FA-D0799F550B99}" type="slidenum">
+            <a:fld id="{1F8382C8-8D4E-4911-9A2B-0027B4E5022E}" type="slidenum">
               <a:rPr lang="en-AU" smtClean="0"/>
               <a:t>‹#›</a:t>
             </a:fld>
@@ -3015,7 +3018,7 @@
     </p:spTree>
     <p:extLst>
       <p:ext uri="{BB962C8B-B14F-4D97-AF65-F5344CB8AC3E}">
-        <p14:creationId xmlns:p14="http://schemas.microsoft.com/office/powerpoint/2010/main" val="466015522"/>
+        <p14:creationId xmlns:p14="http://schemas.microsoft.com/office/powerpoint/2010/main" val="3923177132"/>
       </p:ext>
     </p:extLst>
   </p:cSld>
@@ -3047,7 +3050,7 @@
           <p:cNvPr id="2" name="Date Placeholder 1">
             <a:extLst>
               <a:ext uri="{FF2B5EF4-FFF2-40B4-BE49-F238E27FC236}">
-                <a16:creationId xmlns:a16="http://schemas.microsoft.com/office/drawing/2014/main" id="{CA59F35E-08E3-5A91-5BE9-D06A53ACC971}"/>
+                <a16:creationId xmlns:a16="http://schemas.microsoft.com/office/drawing/2014/main" id="{E1350EAF-B242-00A9-C4B1-A4FB5BE0FDB1}"/>
               </a:ext>
             </a:extLst>
           </p:cNvPr>
@@ -3063,7 +3066,7 @@
           <a:bodyPr/>
           <a:lstStyle/>
           <a:p>
-            <a:fld id="{36CB4863-D0CF-4C1A-A897-B2DF874DF1A6}" type="datetimeFigureOut">
+            <a:fld id="{9BCF9E6B-1C29-4342-BE51-1B794D97C70F}" type="datetimeFigureOut">
               <a:rPr lang="en-AU" smtClean="0"/>
               <a:t>12/10/2026</a:t>
             </a:fld>
@@ -3076,7 +3079,7 @@
           <p:cNvPr id="3" name="Footer Placeholder 2">
             <a:extLst>
               <a:ext uri="{FF2B5EF4-FFF2-40B4-BE49-F238E27FC236}">
-                <a16:creationId xmlns:a16="http://schemas.microsoft.com/office/drawing/2014/main" id="{D59BE3E2-6637-7926-E8F5-1304D5CE87A7}"/>
+                <a16:creationId xmlns:a16="http://schemas.microsoft.com/office/drawing/2014/main" id="{8D71150E-2A1E-3338-3365-9F186B998C61}"/>
               </a:ext>
             </a:extLst>
           </p:cNvPr>
@@ -3101,7 +3104,7 @@
           <p:cNvPr id="4" name="Slide Number Placeholder 3">
             <a:extLst>
               <a:ext uri="{FF2B5EF4-FFF2-40B4-BE49-F238E27FC236}">
-                <a16:creationId xmlns:a16="http://schemas.microsoft.com/office/drawing/2014/main" id="{BCD52498-B52E-5044-A1D9-87F2E1DD7208}"/>
+                <a16:creationId xmlns:a16="http://schemas.microsoft.com/office/drawing/2014/main" id="{B2F55753-9880-FBAC-7194-39E12F32A35D}"/>
               </a:ext>
             </a:extLst>
           </p:cNvPr>
@@ -3117,7 +3120,7 @@
           <a:bodyPr/>
           <a:lstStyle/>
           <a:p>
-            <a:fld id="{2C4A8359-268D-4158-99FA-D0799F550B99}" type="slidenum">
+            <a:fld id="{1F8382C8-8D4E-4911-9A2B-0027B4E5022E}" type="slidenum">
               <a:rPr lang="en-AU" smtClean="0"/>
               <a:t>‹#›</a:t>
             </a:fld>
@@ -3128,7 +3131,7 @@
     </p:spTree>
     <p:extLst>
       <p:ext uri="{BB962C8B-B14F-4D97-AF65-F5344CB8AC3E}">
-        <p14:creationId xmlns:p14="http://schemas.microsoft.com/office/powerpoint/2010/main" val="3249411399"/>
+        <p14:creationId xmlns:p14="http://schemas.microsoft.com/office/powerpoint/2010/main" val="1222674665"/>
       </p:ext>
     </p:extLst>
   </p:cSld>
@@ -3160,7 +3163,7 @@
           <p:cNvPr id="2" name="Title 1">
             <a:extLst>
               <a:ext uri="{FF2B5EF4-FFF2-40B4-BE49-F238E27FC236}">
-                <a16:creationId xmlns:a16="http://schemas.microsoft.com/office/drawing/2014/main" id="{9AD262BD-7134-FBF7-1083-64D393526FEC}"/>
+                <a16:creationId xmlns:a16="http://schemas.microsoft.com/office/drawing/2014/main" id="{7D82BF4D-D96A-72F1-3803-0121CD6000B9}"/>
               </a:ext>
             </a:extLst>
           </p:cNvPr>
@@ -3198,7 +3201,7 @@
           <p:cNvPr id="3" name="Content Placeholder 2">
             <a:extLst>
               <a:ext uri="{FF2B5EF4-FFF2-40B4-BE49-F238E27FC236}">
-                <a16:creationId xmlns:a16="http://schemas.microsoft.com/office/drawing/2014/main" id="{544D7F8B-FBC9-39F0-2D4C-B32CE63FA111}"/>
+                <a16:creationId xmlns:a16="http://schemas.microsoft.com/office/drawing/2014/main" id="{0A5BF827-9606-E9A6-92EA-5B2A6DA5BB43}"/>
               </a:ext>
             </a:extLst>
           </p:cNvPr>
@@ -3289,7 +3292,7 @@
           <p:cNvPr id="4" name="Text Placeholder 3">
             <a:extLst>
               <a:ext uri="{FF2B5EF4-FFF2-40B4-BE49-F238E27FC236}">
-                <a16:creationId xmlns:a16="http://schemas.microsoft.com/office/drawing/2014/main" id="{0529290A-D9F6-D89B-3AFD-2BA3F354AA19}"/>
+                <a16:creationId xmlns:a16="http://schemas.microsoft.com/office/drawing/2014/main" id="{2515FC84-7ABB-00A2-81CE-54AA0C609E2E}"/>
               </a:ext>
             </a:extLst>
           </p:cNvPr>
@@ -3360,7 +3363,7 @@
           <p:cNvPr id="5" name="Date Placeholder 4">
             <a:extLst>
               <a:ext uri="{FF2B5EF4-FFF2-40B4-BE49-F238E27FC236}">
-                <a16:creationId xmlns:a16="http://schemas.microsoft.com/office/drawing/2014/main" id="{10A7A87B-0B63-36BF-C0CC-7FBA715B1A50}"/>
+                <a16:creationId xmlns:a16="http://schemas.microsoft.com/office/drawing/2014/main" id="{1842AF5A-9863-6BCF-9E20-EDE19274C757}"/>
               </a:ext>
             </a:extLst>
           </p:cNvPr>
@@ -3376,7 +3379,7 @@
           <a:bodyPr/>
           <a:lstStyle/>
           <a:p>
-            <a:fld id="{36CB4863-D0CF-4C1A-A897-B2DF874DF1A6}" type="datetimeFigureOut">
+            <a:fld id="{9BCF9E6B-1C29-4342-BE51-1B794D97C70F}" type="datetimeFigureOut">
               <a:rPr lang="en-AU" smtClean="0"/>
               <a:t>12/10/2026</a:t>
             </a:fld>
@@ -3389,7 +3392,7 @@
           <p:cNvPr id="6" name="Footer Placeholder 5">
             <a:extLst>
               <a:ext uri="{FF2B5EF4-FFF2-40B4-BE49-F238E27FC236}">
-                <a16:creationId xmlns:a16="http://schemas.microsoft.com/office/drawing/2014/main" id="{A9A9DFB2-6A4D-97DD-28F6-6EDA55B2FCA3}"/>
+                <a16:creationId xmlns:a16="http://schemas.microsoft.com/office/drawing/2014/main" id="{685D04D0-F719-F8F7-F752-AC1CF55C1DB2}"/>
               </a:ext>
             </a:extLst>
           </p:cNvPr>
@@ -3414,7 +3417,7 @@
           <p:cNvPr id="7" name="Slide Number Placeholder 6">
             <a:extLst>
               <a:ext uri="{FF2B5EF4-FFF2-40B4-BE49-F238E27FC236}">
-                <a16:creationId xmlns:a16="http://schemas.microsoft.com/office/drawing/2014/main" id="{1AF46430-2CBC-9B28-0EC4-75C3D56ABB32}"/>
+                <a16:creationId xmlns:a16="http://schemas.microsoft.com/office/drawing/2014/main" id="{2CB88093-3B37-3FAA-58DE-9E38F24FE826}"/>
               </a:ext>
             </a:extLst>
           </p:cNvPr>
@@ -3430,7 +3433,7 @@
           <a:bodyPr/>
           <a:lstStyle/>
           <a:p>
-            <a:fld id="{2C4A8359-268D-4158-99FA-D0799F550B99}" type="slidenum">
+            <a:fld id="{1F8382C8-8D4E-4911-9A2B-0027B4E5022E}" type="slidenum">
               <a:rPr lang="en-AU" smtClean="0"/>
               <a:t>‹#›</a:t>
             </a:fld>
@@ -3441,7 +3444,7 @@
     </p:spTree>
     <p:extLst>
       <p:ext uri="{BB962C8B-B14F-4D97-AF65-F5344CB8AC3E}">
-        <p14:creationId xmlns:p14="http://schemas.microsoft.com/office/powerpoint/2010/main" val="508775533"/>
+        <p14:creationId xmlns:p14="http://schemas.microsoft.com/office/powerpoint/2010/main" val="1086767058"/>
       </p:ext>
     </p:extLst>
   </p:cSld>
@@ -3473,7 +3476,7 @@
           <p:cNvPr id="2" name="Title 1">
             <a:extLst>
               <a:ext uri="{FF2B5EF4-FFF2-40B4-BE49-F238E27FC236}">
-                <a16:creationId xmlns:a16="http://schemas.microsoft.com/office/drawing/2014/main" id="{7311E535-FCEA-AD72-5535-9E0AB9798F47}"/>
+                <a16:creationId xmlns:a16="http://schemas.microsoft.com/office/drawing/2014/main" id="{963A6D46-8585-31AE-50EB-A5A092224811}"/>
               </a:ext>
             </a:extLst>
           </p:cNvPr>
@@ -3511,7 +3514,7 @@
           <p:cNvPr id="3" name="Picture Placeholder 2">
             <a:extLst>
               <a:ext uri="{FF2B5EF4-FFF2-40B4-BE49-F238E27FC236}">
-                <a16:creationId xmlns:a16="http://schemas.microsoft.com/office/drawing/2014/main" id="{BBCF5A43-FF59-DAE7-7467-76F6B124B1F1}"/>
+                <a16:creationId xmlns:a16="http://schemas.microsoft.com/office/drawing/2014/main" id="{3FDA0CA0-804F-3E3D-72DC-ABB6D39B52A4}"/>
               </a:ext>
             </a:extLst>
           </p:cNvPr>
@@ -3578,7 +3581,7 @@
           <p:cNvPr id="4" name="Text Placeholder 3">
             <a:extLst>
               <a:ext uri="{FF2B5EF4-FFF2-40B4-BE49-F238E27FC236}">
-                <a16:creationId xmlns:a16="http://schemas.microsoft.com/office/drawing/2014/main" id="{E6C1CC1A-2747-25CE-17F4-DF5E4F66AF04}"/>
+                <a16:creationId xmlns:a16="http://schemas.microsoft.com/office/drawing/2014/main" id="{361BED2F-C280-6777-466A-BC522656B4AC}"/>
               </a:ext>
             </a:extLst>
           </p:cNvPr>
@@ -3649,7 +3652,7 @@
           <p:cNvPr id="5" name="Date Placeholder 4">
             <a:extLst>
               <a:ext uri="{FF2B5EF4-FFF2-40B4-BE49-F238E27FC236}">
-                <a16:creationId xmlns:a16="http://schemas.microsoft.com/office/drawing/2014/main" id="{93C29715-8735-626A-F031-B21791E0679E}"/>
+                <a16:creationId xmlns:a16="http://schemas.microsoft.com/office/drawing/2014/main" id="{6361E6A4-6BF2-4F7B-42DC-06856D8B6AB5}"/>
               </a:ext>
             </a:extLst>
           </p:cNvPr>
@@ -3665,7 +3668,7 @@
           <a:bodyPr/>
           <a:lstStyle/>
           <a:p>
-            <a:fld id="{36CB4863-D0CF-4C1A-A897-B2DF874DF1A6}" type="datetimeFigureOut">
+            <a:fld id="{9BCF9E6B-1C29-4342-BE51-1B794D97C70F}" type="datetimeFigureOut">
               <a:rPr lang="en-AU" smtClean="0"/>
               <a:t>12/10/2026</a:t>
             </a:fld>
@@ -3678,7 +3681,7 @@
           <p:cNvPr id="6" name="Footer Placeholder 5">
             <a:extLst>
               <a:ext uri="{FF2B5EF4-FFF2-40B4-BE49-F238E27FC236}">
-                <a16:creationId xmlns:a16="http://schemas.microsoft.com/office/drawing/2014/main" id="{88A396C6-5877-0647-4269-8EF8B83E753B}"/>
+                <a16:creationId xmlns:a16="http://schemas.microsoft.com/office/drawing/2014/main" id="{C26432A7-64B1-3942-5223-708220E57AC3}"/>
               </a:ext>
             </a:extLst>
           </p:cNvPr>
@@ -3703,7 +3706,7 @@
           <p:cNvPr id="7" name="Slide Number Placeholder 6">
             <a:extLst>
               <a:ext uri="{FF2B5EF4-FFF2-40B4-BE49-F238E27FC236}">
-                <a16:creationId xmlns:a16="http://schemas.microsoft.com/office/drawing/2014/main" id="{4309F1CD-ACBC-4556-0A58-15B738CFC40F}"/>
+                <a16:creationId xmlns:a16="http://schemas.microsoft.com/office/drawing/2014/main" id="{ABBCC7CF-C2C6-6A8F-A05E-EA5656F3A946}"/>
               </a:ext>
             </a:extLst>
           </p:cNvPr>
@@ -3719,7 +3722,7 @@
           <a:bodyPr/>
           <a:lstStyle/>
           <a:p>
-            <a:fld id="{2C4A8359-268D-4158-99FA-D0799F550B99}" type="slidenum">
+            <a:fld id="{1F8382C8-8D4E-4911-9A2B-0027B4E5022E}" type="slidenum">
               <a:rPr lang="en-AU" smtClean="0"/>
               <a:t>‹#›</a:t>
             </a:fld>
@@ -3730,7 +3733,7 @@
     </p:spTree>
     <p:extLst>
       <p:ext uri="{BB962C8B-B14F-4D97-AF65-F5344CB8AC3E}">
-        <p14:creationId xmlns:p14="http://schemas.microsoft.com/office/powerpoint/2010/main" val="2041746793"/>
+        <p14:creationId xmlns:p14="http://schemas.microsoft.com/office/powerpoint/2010/main" val="1944422568"/>
       </p:ext>
     </p:extLst>
   </p:cSld>
@@ -3767,7 +3770,7 @@
           <p:cNvPr id="2" name="Title Placeholder 1">
             <a:extLst>
               <a:ext uri="{FF2B5EF4-FFF2-40B4-BE49-F238E27FC236}">
-                <a16:creationId xmlns:a16="http://schemas.microsoft.com/office/drawing/2014/main" id="{FC0B9DCF-4513-BD32-1E0F-9187A9268EF4}"/>
+                <a16:creationId xmlns:a16="http://schemas.microsoft.com/office/drawing/2014/main" id="{C5D4CEDE-B3EE-BEA9-916F-B1E732F67CD2}"/>
               </a:ext>
             </a:extLst>
           </p:cNvPr>
@@ -3806,7 +3809,7 @@
           <p:cNvPr id="3" name="Text Placeholder 2">
             <a:extLst>
               <a:ext uri="{FF2B5EF4-FFF2-40B4-BE49-F238E27FC236}">
-                <a16:creationId xmlns:a16="http://schemas.microsoft.com/office/drawing/2014/main" id="{4D12E391-5324-FB5B-51BC-569C3296CD61}"/>
+                <a16:creationId xmlns:a16="http://schemas.microsoft.com/office/drawing/2014/main" id="{638AD6C2-00C3-5D38-74D7-F4D0EEA275D8}"/>
               </a:ext>
             </a:extLst>
           </p:cNvPr>
@@ -3874,7 +3877,7 @@
           <p:cNvPr id="4" name="Date Placeholder 3">
             <a:extLst>
               <a:ext uri="{FF2B5EF4-FFF2-40B4-BE49-F238E27FC236}">
-                <a16:creationId xmlns:a16="http://schemas.microsoft.com/office/drawing/2014/main" id="{7430A5DA-EBB3-0925-3663-7CB941C23557}"/>
+                <a16:creationId xmlns:a16="http://schemas.microsoft.com/office/drawing/2014/main" id="{5552ED06-50C2-3B26-6873-68943F91BA60}"/>
               </a:ext>
             </a:extLst>
           </p:cNvPr>
@@ -3908,7 +3911,7 @@
             </a:lvl1pPr>
           </a:lstStyle>
           <a:p>
-            <a:fld id="{36CB4863-D0CF-4C1A-A897-B2DF874DF1A6}" type="datetimeFigureOut">
+            <a:fld id="{9BCF9E6B-1C29-4342-BE51-1B794D97C70F}" type="datetimeFigureOut">
               <a:rPr lang="en-AU" smtClean="0"/>
               <a:t>12/10/2026</a:t>
             </a:fld>
@@ -3921,7 +3924,7 @@
           <p:cNvPr id="5" name="Footer Placeholder 4">
             <a:extLst>
               <a:ext uri="{FF2B5EF4-FFF2-40B4-BE49-F238E27FC236}">
-                <a16:creationId xmlns:a16="http://schemas.microsoft.com/office/drawing/2014/main" id="{5F1D37B1-B38A-F428-E06B-27C5ADA5E1E3}"/>
+                <a16:creationId xmlns:a16="http://schemas.microsoft.com/office/drawing/2014/main" id="{23437BF1-473F-11AA-6B7B-CF20A4E97F87}"/>
               </a:ext>
             </a:extLst>
           </p:cNvPr>
@@ -3964,7 +3967,7 @@
           <p:cNvPr id="6" name="Slide Number Placeholder 5">
             <a:extLst>
               <a:ext uri="{FF2B5EF4-FFF2-40B4-BE49-F238E27FC236}">
-                <a16:creationId xmlns:a16="http://schemas.microsoft.com/office/drawing/2014/main" id="{73FBE600-DF0D-A41B-1CA2-C76653EBA2A1}"/>
+                <a16:creationId xmlns:a16="http://schemas.microsoft.com/office/drawing/2014/main" id="{F4329121-86C8-CB2B-F5C8-CAAD0434C35A}"/>
               </a:ext>
             </a:extLst>
           </p:cNvPr>
@@ -3998,7 +4001,7 @@
             </a:lvl1pPr>
           </a:lstStyle>
           <a:p>
-            <a:fld id="{2C4A8359-268D-4158-99FA-D0799F550B99}" type="slidenum">
+            <a:fld id="{1F8382C8-8D4E-4911-9A2B-0027B4E5022E}" type="slidenum">
               <a:rPr lang="en-AU" smtClean="0"/>
               <a:t>‹#›</a:t>
             </a:fld>
@@ -4009,7 +4012,7 @@
     </p:spTree>
     <p:extLst>
       <p:ext uri="{BB962C8B-B14F-4D97-AF65-F5344CB8AC3E}">
-        <p14:creationId xmlns:p14="http://schemas.microsoft.com/office/powerpoint/2010/main" val="766114736"/>
+        <p14:creationId xmlns:p14="http://schemas.microsoft.com/office/powerpoint/2010/main" val="1634490651"/>
       </p:ext>
     </p:extLst>
   </p:cSld>
@@ -4332,7 +4335,7 @@
           <p:cNvPr id="2" name="Chart 1">
             <a:extLst>
               <a:ext uri="{FF2B5EF4-FFF2-40B4-BE49-F238E27FC236}">
-                <a16:creationId xmlns:a16="http://schemas.microsoft.com/office/drawing/2014/main" id="{E3522F98-7518-9CD9-3C20-314E4E367B5C}"/>
+                <a16:creationId xmlns:a16="http://schemas.microsoft.com/office/drawing/2014/main" id="{701FC51B-A057-B716-C52E-4076A039EA0C}"/>
               </a:ext>
             </a:extLst>
           </p:cNvPr>
@@ -4340,7 +4343,7 @@
           <p:nvPr>
             <p:extLst>
               <p:ext uri="{D42A27DB-BD31-4B8C-83A1-F6EECF244321}">
-                <p14:modId xmlns:p14="http://schemas.microsoft.com/office/powerpoint/2010/main" val="3815131313"/>
+                <p14:modId xmlns:p14="http://schemas.microsoft.com/office/powerpoint/2010/main" val="2412296475"/>
               </p:ext>
             </p:extLst>
           </p:nvPr>
@@ -4358,7 +4361,7 @@
     </p:spTree>
     <p:extLst>
       <p:ext uri="{BB962C8B-B14F-4D97-AF65-F5344CB8AC3E}">
-        <p14:creationId xmlns:p14="http://schemas.microsoft.com/office/powerpoint/2010/main" val="1973041781"/>
+        <p14:creationId xmlns:p14="http://schemas.microsoft.com/office/powerpoint/2010/main" val="647499708"/>
       </p:ext>
     </p:extLst>
   </p:cSld>
